--- a/DBTUNING/ch28_경고메트릭_상시모니터링/ch28_경고와메트릭_상시모니터링.pptx
+++ b/DBTUNING/ch28_경고메트릭_상시모니터링/ch28_경고와메트릭_상시모니터링.pptx
@@ -1098,7 +1098,7 @@
           <a:lstStyle/>
           <a:p>
             <a:r>
-              <a:t>핵심은 위에서 아래로 좁혀 가는 것이다. '알림이 왔다'에서 곧바로 '이 SQL이 문제다'로 건너뛰지 않는다. 부하가 인스턴스 전반인지 특정 세션·서비스인지 먼저 가른 다음 활성 세션→대기→SQL로 내려간다. 대응하면서 조치 전 상태를 캡처해 근거를 남긴다. 그래야 조치 효과를 증명하고, 같은 알림이 반복될 때 근본 원인을 추적할 수 있다. 이 순서는 3장의 응급 대응 절차와 13~14장의 V$ 진단 경로를 알림 상황에 맞게 재구성한 것이다.</a:t>
+              <a:t>핵심은 위에서 아래로 좁혀 가는 것이다. '알림이 왔다'에서 곧바로 '이 SQL이 문제다'로 건너뛰지 않는다. 부하가 인스턴스 전반인지 특정 세션·서비스인지 먼저 가른 다음 활성 세션→대기→SQL로 내려간다. 대응하면서 조치 전 상태를 캡처해 근거를 남긴다. 그래야 조치 효과를 증명하고, 같은 알림이 반복될 때 근본 원인을 추적할 수 있다. 이 순서는 ch17의 응급 대응 절차와 ch26~ch27의 V$ 진단 경로를 알림 상황에 맞게 재구성한 것이다.</a:t>
             </a:r>
           </a:p>
         </p:txBody>
@@ -1448,7 +1448,7 @@
           <a:lstStyle/>
           <a:p>
             <a:r>
-              <a:t>상시 모니터링에서 세션은 ACTIVE/INACTIVE/KILLED로 구분한다. 활성 세션 수가 갑자기 늘었다면 그것이 바빠서인지 기다려서인지를 event로 가른다. 라이선스가 없어도 이 조회를 짧은 주기로 반복하면 ASH를 흉내 낼 수 있다(1장 대안 경로). 부하가 없으면 행이 없는 것이 정상이다. 장기 작업(정상적으로 오래 걸리는 배치)과 갑자기 몰린 대기(비정상 경합)를 함께 보아야 대응을 혼동하지 않는다.</a:t>
+              <a:t>상시 모니터링에서 세션은 ACTIVE/INACTIVE/KILLED로 구분한다. 활성 세션 수가 갑자기 늘었다면 그것이 바빠서인지 기다려서인지를 event로 가른다. 라이선스가 없어도 이 조회를 짧은 주기로 반복하면 ASH를 흉내 낼 수 있다(ch15 대안 경로). 부하가 없으면 행이 없는 것이 정상이다. 장기 작업(정상적으로 오래 걸리는 배치)과 갑자기 몰린 대기(비정상 경합)를 함께 보아야 대응을 혼동하지 않는다.</a:t>
             </a:r>
           </a:p>
         </p:txBody>
@@ -1518,7 +1518,7 @@
           <a:lstStyle/>
           <a:p>
             <a:r>
-              <a:t>value는 인스턴스 기동 이후 누적이라 두 시점 델타로 봐야 의미가 있다(1장·5장 원칙). 서비스가 여럿이면 같은 구간의 서비스별 DB time 델타를 비교해 부하가 어느 업무에 몰렸는지 가른다. 실습 환경은 orcl 서비스 하나뿐이지만, 운영에서는 DBMS_SERVICE로 업무별 서비스를 분리 등록해 두어야 이 관찰이 의미를 갖는다. 서비스 설계가 곧 모니터링 설계다.</a:t>
+              <a:t>value는 인스턴스 기동 이후 누적이라 두 시점 델타로 봐야 의미가 있다(ch15·ch19 원칙). 서비스가 여럿이면 같은 구간의 서비스별 DB time 델타를 비교해 부하가 어느 업무에 몰렸는지 가른다. 실습 환경은 orcl 서비스 하나뿐이지만, 운영에서는 DBMS_SERVICE로 업무별 서비스를 분리 등록해 두어야 이 관찰이 의미를 갖는다. 서비스 설계가 곧 모니터링 설계다.</a:t>
             </a:r>
           </a:p>
         </p:txBody>
@@ -5428,7 +5428,7 @@
                 </a:solidFill>
                 <a:latin typeface="맑은 고딕"/>
               </a:rPr>
-              <a:t>제12장</a:t>
+              <a:t>제ch28</a:t>
             </a:r>
           </a:p>
         </p:txBody>
@@ -10157,7 +10157,7 @@
                 </a:solidFill>
                 <a:latin typeface="맑은 고딕"/>
               </a:rPr>
-              <a:t>3장의 원칙을 알림 상황에</a:t>
+              <a:t>ch17의 원칙을 알림 상황에</a:t>
             </a:r>
           </a:p>
         </p:txBody>
@@ -11099,7 +11099,7 @@
                 </a:solidFill>
                 <a:latin typeface="맑은 고딕"/>
               </a:rPr>
-              <a:t>•  enq: TX 몰림 = 잠금 → 다음은 BLOCKING_SESSION 추적(14장)</a:t>
+              <a:t>•  enq: TX 몰림 = 잠금 → 다음은 BLOCKING_SESSION 추적(ch27)</a:t>
             </a:r>
           </a:p>
           <a:p>

--- a/DBTUNING/ch28_경고메트릭_상시모니터링/ch28_경고와메트릭_상시모니터링.pptx
+++ b/DBTUNING/ch28_경고메트릭_상시모니터링/ch28_경고와메트릭_상시모니터링.pptx
@@ -5428,7 +5428,7 @@
                 </a:solidFill>
                 <a:latin typeface="맑은 고딕"/>
               </a:rPr>
-              <a:t>제ch28</a:t>
+              <a:t>ch28</a:t>
             </a:r>
           </a:p>
         </p:txBody>

--- a/DBTUNING/ch28_경고메트릭_상시모니터링/ch28_경고와메트릭_상시모니터링.pptx
+++ b/DBTUNING/ch28_경고메트릭_상시모니터링/ch28_경고와메트릭_상시모니터링.pptx
@@ -5524,7 +5524,7 @@
                 </a:solidFill>
                 <a:latin typeface="맑은 고딕"/>
               </a:rPr>
-              <a:t>12.3</a:t>
+              <a:t>28.3</a:t>
             </a:r>
           </a:p>
         </p:txBody>
@@ -6413,7 +6413,7 @@
                 </a:solidFill>
                 <a:latin typeface="맑은 고딕"/>
               </a:rPr>
-              <a:t>값은 12.4에서 이력으로 산정</a:t>
+              <a:t>값은 28.4에서 이력으로 산정</a:t>
             </a:r>
           </a:p>
         </p:txBody>
@@ -6957,7 +6957,7 @@
                 </a:solidFill>
                 <a:latin typeface="맑은 고딕"/>
               </a:rPr>
-              <a:t>12.4</a:t>
+              <a:t>28.4</a:t>
             </a:r>
           </a:p>
         </p:txBody>
@@ -9380,7 +9380,7 @@
                 </a:solidFill>
                 <a:latin typeface="맑은 고딕"/>
               </a:rPr>
-              <a:t>12.5</a:t>
+              <a:t>28.5</a:t>
             </a:r>
           </a:p>
         </p:txBody>
@@ -10356,7 +10356,7 @@
                 </a:solidFill>
                 <a:latin typeface="맑은 고딕"/>
               </a:rPr>
-              <a:t>12.6</a:t>
+              <a:t>28.6</a:t>
             </a:r>
           </a:p>
         </p:txBody>
@@ -11250,7 +11250,7 @@
                 </a:solidFill>
                 <a:latin typeface="맑은 고딕"/>
               </a:rPr>
-              <a:t>•  12.2  서버 생성 알림의 구조 — 무엇이 언제 울리는가</a:t>
+              <a:t>•  28.2  서버 생성 알림의 구조 — 무엇이 언제 울리는가</a:t>
             </a:r>
           </a:p>
           <a:p>
@@ -11266,7 +11266,7 @@
                 </a:solidFill>
                 <a:latin typeface="맑은 고딕"/>
               </a:rPr>
-              <a:t>•  12.3  메트릭 임계값 설정 — DBMS_SERVER_ALERT.SET_THRESHOLD</a:t>
+              <a:t>•  28.3  메트릭 임계값 설정 — DBMS_SERVER_ALERT.SET_THRESHOLD</a:t>
             </a:r>
           </a:p>
           <a:p>
@@ -11282,7 +11282,7 @@
                 </a:solidFill>
                 <a:latin typeface="맑은 고딕"/>
               </a:rPr>
-              <a:t>•  12.4  임계값을 얼마로 잡을 것인가 — 이력 분포 산정 (핵심 · 🔒)</a:t>
+              <a:t>•  28.4  임계값을 얼마로 잡을 것인가 — 이력 분포 산정 (핵심 · 🔒)</a:t>
             </a:r>
           </a:p>
           <a:p>
@@ -11298,7 +11298,7 @@
                 </a:solidFill>
                 <a:latin typeface="맑은 고딕"/>
               </a:rPr>
-              <a:t>•  12.5  알림 대응 절차 — 울렸을 때 무엇부터 보는가</a:t>
+              <a:t>•  28.5  알림 대응 절차 — 울렸을 때 무엇부터 보는가</a:t>
             </a:r>
           </a:p>
           <a:p>
@@ -11314,7 +11314,7 @@
                 </a:solidFill>
                 <a:latin typeface="맑은 고딕"/>
               </a:rPr>
-              <a:t>•  12.6  세션 모니터링 — 활성 세션·장기 실행 작업</a:t>
+              <a:t>•  28.6  세션 모니터링 — 활성 세션·장기 실행 작업</a:t>
             </a:r>
           </a:p>
           <a:p>
@@ -11330,7 +11330,7 @@
                 </a:solidFill>
                 <a:latin typeface="맑은 고딕"/>
               </a:rPr>
-              <a:t>•  12.7  서비스 단위 모니터링 — 업무별로 나눠 본다</a:t>
+              <a:t>•  28.7  서비스 단위 모니터링 — 업무별로 나눠 본다</a:t>
             </a:r>
           </a:p>
           <a:p>
@@ -11346,7 +11346,7 @@
                 </a:solidFill>
                 <a:latin typeface="맑은 고딕"/>
               </a:rPr>
-              <a:t>•  12.8  흔한 함정 — 임계값을 낮게 잡아 알림 피로</a:t>
+              <a:t>•  28.8  흔한 함정 — 임계값을 낮게 잡아 알림 피로</a:t>
             </a:r>
           </a:p>
           <a:p>
@@ -11458,7 +11458,7 @@
                 </a:solidFill>
                 <a:latin typeface="맑은 고딕"/>
               </a:rPr>
-              <a:t>12.7</a:t>
+              <a:t>28.7</a:t>
             </a:r>
           </a:p>
         </p:txBody>
@@ -12370,7 +12370,7 @@
                 </a:solidFill>
                 <a:latin typeface="맑은 고딕"/>
               </a:rPr>
-              <a:t>12.8</a:t>
+              <a:t>28.8</a:t>
             </a:r>
           </a:p>
         </p:txBody>
@@ -13557,7 +13557,7 @@
                 </a:solidFill>
                 <a:latin typeface="맑은 고딕"/>
               </a:rPr>
-              <a:t>12.2</a:t>
+              <a:t>28.2</a:t>
             </a:r>
           </a:p>
         </p:txBody>
